--- a/docs/ICAPST-2026-Poster_Template.pptx
+++ b/docs/ICAPST-2026-Poster_Template.pptx
@@ -5315,7 +5315,7 @@
         <p:spPr>
           <a:xfrm>
             <a:off x="14167538" y="26759152"/>
-            <a:ext cx="6663490" cy="2175046"/>
+            <a:ext cx="6663490" cy="2213298"/>
           </a:xfrm>
           <a:prstGeom prst="rect">
             <a:avLst/>
@@ -5479,43 +5479,6 @@
             </a:endParaRPr>
           </a:p>
         </p:txBody>
-      </p:sp>
-      <p:sp>
-        <p:nvSpPr>
-          <p:cNvPr id="74" name="CustomShape 15"/>
-          <p:cNvSpPr/>
-          <p:nvPr/>
-        </p:nvSpPr>
-        <p:spPr>
-          <a:xfrm>
-            <a:off x="327530" y="3477810"/>
-            <a:ext cx="20690812" cy="26494966"/>
-          </a:xfrm>
-          <a:prstGeom prst="rect">
-            <a:avLst/>
-          </a:prstGeom>
-          <a:noFill/>
-          <a:ln w="38160">
-            <a:solidFill>
-              <a:srgbClr val="0070C0"/>
-            </a:solidFill>
-            <a:round/>
-          </a:ln>
-        </p:spPr>
-        <p:style>
-          <a:lnRef idx="2">
-            <a:schemeClr val="accent1">
-              <a:shade val="50000"/>
-            </a:schemeClr>
-          </a:lnRef>
-          <a:fillRef idx="1">
-            <a:schemeClr val="accent1"/>
-          </a:fillRef>
-          <a:effectRef idx="0">
-            <a:schemeClr val="accent1"/>
-          </a:effectRef>
-          <a:fontRef idx="minor"/>
-        </p:style>
       </p:sp>
       <p:sp>
         <p:nvSpPr>
@@ -6388,123 +6351,6 @@
       </p:sp>
       <p:sp>
         <p:nvSpPr>
-          <p:cNvPr id="8" name="CustomShape 14">
-            <a:extLst>
-              <a:ext uri="{FF2B5EF4-FFF2-40B4-BE49-F238E27FC236}">
-                <a16:creationId xmlns:a16="http://schemas.microsoft.com/office/drawing/2014/main" id="{F670B2EC-C69E-023D-DBB3-394D7D1A6B15}"/>
-              </a:ext>
-            </a:extLst>
-          </p:cNvPr>
-          <p:cNvSpPr/>
-          <p:nvPr/>
-        </p:nvSpPr>
-        <p:spPr>
-          <a:xfrm>
-            <a:off x="555023" y="29057305"/>
-            <a:ext cx="20273578" cy="748432"/>
-          </a:xfrm>
-          <a:prstGeom prst="rect">
-            <a:avLst/>
-          </a:prstGeom>
-          <a:noFill/>
-          <a:ln>
-            <a:solidFill>
-              <a:srgbClr val="0070C0"/>
-            </a:solidFill>
-          </a:ln>
-        </p:spPr>
-        <p:style>
-          <a:lnRef idx="0">
-            <a:scrgbClr r="0" g="0" b="0"/>
-          </a:lnRef>
-          <a:fillRef idx="0">
-            <a:scrgbClr r="0" g="0" b="0"/>
-          </a:fillRef>
-          <a:effectRef idx="0">
-            <a:scrgbClr r="0" g="0" b="0"/>
-          </a:effectRef>
-          <a:fontRef idx="minor"/>
-        </p:style>
-        <p:txBody>
-          <a:bodyPr lIns="50374" tIns="24932" rIns="50374" bIns="24932" anchor="ctr">
-            <a:noAutofit/>
-          </a:bodyPr>
-          <a:lstStyle/>
-          <a:p>
-            <a:pPr algn="ctr"/>
-            <a:r>
-              <a:rPr lang="en-US" sz="2800" b="1" dirty="0">
-                <a:solidFill>
-                  <a:srgbClr val="C00000"/>
-                </a:solidFill>
-                <a:latin typeface="Times New Roman" panose="02020603050405020304" pitchFamily="18" charset="0"/>
-                <a:cs typeface="Times New Roman" panose="02020603050405020304" pitchFamily="18" charset="0"/>
-              </a:rPr>
-              <a:t> </a:t>
-            </a:r>
-            <a:r>
-              <a:rPr lang="en-IN" sz="2000" b="1" dirty="0">
-                <a:solidFill>
-                  <a:srgbClr val="C00000"/>
-                </a:solidFill>
-                <a:latin typeface="Times New Roman" panose="02020603050405020304" pitchFamily="18" charset="0"/>
-                <a:cs typeface="Times New Roman" panose="02020603050405020304" pitchFamily="18" charset="0"/>
-              </a:rPr>
-              <a:t>1</a:t>
-            </a:r>
-            <a:r>
-              <a:rPr lang="en-IN" sz="2000" b="1" baseline="30000" dirty="0">
-                <a:solidFill>
-                  <a:srgbClr val="C00000"/>
-                </a:solidFill>
-                <a:latin typeface="Times New Roman" panose="02020603050405020304" pitchFamily="18" charset="0"/>
-                <a:cs typeface="Times New Roman" panose="02020603050405020304" pitchFamily="18" charset="0"/>
-              </a:rPr>
-              <a:t>st</a:t>
-            </a:r>
-            <a:r>
-              <a:rPr lang="en-IN" sz="2000" b="1" dirty="0">
-                <a:solidFill>
-                  <a:srgbClr val="C00000"/>
-                </a:solidFill>
-                <a:latin typeface="Times New Roman" panose="02020603050405020304" pitchFamily="18" charset="0"/>
-                <a:cs typeface="Times New Roman" panose="02020603050405020304" pitchFamily="18" charset="0"/>
-              </a:rPr>
-              <a:t> International Conference on Advances in Physical Sciences &amp; Technologies</a:t>
-            </a:r>
-            <a:r>
-              <a:rPr lang="en-US" sz="2000" b="1" dirty="0">
-                <a:solidFill>
-                  <a:srgbClr val="C00000"/>
-                </a:solidFill>
-                <a:latin typeface="Times New Roman" panose="02020603050405020304" pitchFamily="18" charset="0"/>
-                <a:cs typeface="Times New Roman" panose="02020603050405020304" pitchFamily="18" charset="0"/>
-              </a:rPr>
-              <a:t> (ICAPST-2026)</a:t>
-            </a:r>
-          </a:p>
-          <a:p>
-            <a:pPr algn="ctr">
-              <a:tabLst>
-                <a:tab pos="0" algn="l"/>
-              </a:tabLst>
-            </a:pPr>
-            <a:r>
-              <a:rPr lang="en-IN" sz="2000" b="1" spc="-1" dirty="0">
-                <a:latin typeface="Times New Roman" panose="02020603050405020304" pitchFamily="18" charset="0"/>
-                <a:cs typeface="Times New Roman" panose="02020603050405020304" pitchFamily="18" charset="0"/>
-              </a:rPr>
-              <a:t>October 22-24, 2026, University of Rajasthan, Jaipur, Rajasthan</a:t>
-            </a:r>
-            <a:endParaRPr lang="en-IN" sz="2000" spc="-1" dirty="0">
-              <a:latin typeface="Times New Roman" panose="02020603050405020304" pitchFamily="18" charset="0"/>
-              <a:cs typeface="Times New Roman" panose="02020603050405020304" pitchFamily="18" charset="0"/>
-            </a:endParaRPr>
-          </a:p>
-        </p:txBody>
-      </p:sp>
-      <p:sp>
-        <p:nvSpPr>
           <p:cNvPr id="9" name="CustomShape 20">
             <a:extLst>
               <a:ext uri="{FF2B5EF4-FFF2-40B4-BE49-F238E27FC236}">
@@ -7035,6 +6881,214 @@
               </a:lnSpc>
             </a:pPr>
             <a:endParaRPr lang="en-IN" sz="3600" spc="-1" dirty="0">
+              <a:latin typeface="Times New Roman" panose="02020603050405020304" pitchFamily="18" charset="0"/>
+              <a:cs typeface="Times New Roman" panose="02020603050405020304" pitchFamily="18" charset="0"/>
+            </a:endParaRPr>
+          </a:p>
+        </p:txBody>
+      </p:sp>
+      <p:sp>
+        <p:nvSpPr>
+          <p:cNvPr id="4" name="Rounded Rectangle 3">
+            <a:extLst>
+              <a:ext uri="{FF2B5EF4-FFF2-40B4-BE49-F238E27FC236}">
+                <a16:creationId xmlns:a16="http://schemas.microsoft.com/office/drawing/2014/main" id="{07EA1440-6A14-E611-10BB-54E90C710035}"/>
+              </a:ext>
+            </a:extLst>
+          </p:cNvPr>
+          <p:cNvSpPr/>
+          <p:nvPr/>
+        </p:nvSpPr>
+        <p:spPr>
+          <a:xfrm>
+            <a:off x="19490402" y="29820750"/>
+            <a:ext cx="1630906" cy="407538"/>
+          </a:xfrm>
+          <a:prstGeom prst="roundRect">
+            <a:avLst/>
+          </a:prstGeom>
+          <a:solidFill>
+            <a:schemeClr val="bg1"/>
+          </a:solidFill>
+          <a:ln>
+            <a:solidFill>
+              <a:schemeClr val="bg1"/>
+            </a:solidFill>
+          </a:ln>
+        </p:spPr>
+        <p:style>
+          <a:lnRef idx="2">
+            <a:schemeClr val="accent1">
+              <a:shade val="50000"/>
+            </a:schemeClr>
+          </a:lnRef>
+          <a:fillRef idx="1">
+            <a:schemeClr val="accent1"/>
+          </a:fillRef>
+          <a:effectRef idx="0">
+            <a:schemeClr val="accent1"/>
+          </a:effectRef>
+          <a:fontRef idx="minor">
+            <a:schemeClr val="lt1"/>
+          </a:fontRef>
+        </p:style>
+        <p:txBody>
+          <a:bodyPr rtlCol="0" anchor="ctr"/>
+          <a:lstStyle/>
+          <a:p>
+            <a:pPr algn="ctr"/>
+            <a:endParaRPr lang="en-US"/>
+          </a:p>
+        </p:txBody>
+      </p:sp>
+      <p:sp>
+        <p:nvSpPr>
+          <p:cNvPr id="74" name="CustomShape 15"/>
+          <p:cNvSpPr/>
+          <p:nvPr/>
+        </p:nvSpPr>
+        <p:spPr>
+          <a:xfrm>
+            <a:off x="297907" y="2766183"/>
+            <a:ext cx="20690812" cy="27195796"/>
+          </a:xfrm>
+          <a:prstGeom prst="rect">
+            <a:avLst/>
+          </a:prstGeom>
+          <a:noFill/>
+          <a:ln w="38160">
+            <a:solidFill>
+              <a:srgbClr val="0070C0"/>
+            </a:solidFill>
+            <a:round/>
+          </a:ln>
+        </p:spPr>
+        <p:style>
+          <a:lnRef idx="2">
+            <a:schemeClr val="accent1">
+              <a:shade val="50000"/>
+            </a:schemeClr>
+          </a:lnRef>
+          <a:fillRef idx="1">
+            <a:schemeClr val="accent1"/>
+          </a:fillRef>
+          <a:effectRef idx="0">
+            <a:schemeClr val="accent1"/>
+          </a:effectRef>
+          <a:fontRef idx="minor"/>
+        </p:style>
+      </p:sp>
+      <p:sp>
+        <p:nvSpPr>
+          <p:cNvPr id="8" name="CustomShape 14">
+            <a:extLst>
+              <a:ext uri="{FF2B5EF4-FFF2-40B4-BE49-F238E27FC236}">
+                <a16:creationId xmlns:a16="http://schemas.microsoft.com/office/drawing/2014/main" id="{F670B2EC-C69E-023D-DBB3-394D7D1A6B15}"/>
+              </a:ext>
+            </a:extLst>
+          </p:cNvPr>
+          <p:cNvSpPr/>
+          <p:nvPr/>
+        </p:nvSpPr>
+        <p:spPr>
+          <a:xfrm>
+            <a:off x="574818" y="29113795"/>
+            <a:ext cx="20273578" cy="748432"/>
+          </a:xfrm>
+          <a:prstGeom prst="rect">
+            <a:avLst/>
+          </a:prstGeom>
+          <a:noFill/>
+          <a:ln>
+            <a:solidFill>
+              <a:srgbClr val="0070C0"/>
+            </a:solidFill>
+          </a:ln>
+        </p:spPr>
+        <p:style>
+          <a:lnRef idx="0">
+            <a:scrgbClr r="0" g="0" b="0"/>
+          </a:lnRef>
+          <a:fillRef idx="0">
+            <a:scrgbClr r="0" g="0" b="0"/>
+          </a:fillRef>
+          <a:effectRef idx="0">
+            <a:scrgbClr r="0" g="0" b="0"/>
+          </a:effectRef>
+          <a:fontRef idx="minor"/>
+        </p:style>
+        <p:txBody>
+          <a:bodyPr lIns="50374" tIns="24932" rIns="50374" bIns="24932" anchor="ctr">
+            <a:noAutofit/>
+          </a:bodyPr>
+          <a:lstStyle/>
+          <a:p>
+            <a:pPr algn="ctr"/>
+            <a:r>
+              <a:rPr lang="en-US" sz="2800" b="1" dirty="0">
+                <a:solidFill>
+                  <a:srgbClr val="C00000"/>
+                </a:solidFill>
+                <a:latin typeface="Times New Roman" panose="02020603050405020304" pitchFamily="18" charset="0"/>
+                <a:cs typeface="Times New Roman" panose="02020603050405020304" pitchFamily="18" charset="0"/>
+              </a:rPr>
+              <a:t> </a:t>
+            </a:r>
+            <a:r>
+              <a:rPr lang="en-IN" sz="2000" b="1" dirty="0">
+                <a:solidFill>
+                  <a:srgbClr val="C00000"/>
+                </a:solidFill>
+                <a:latin typeface="Times New Roman" panose="02020603050405020304" pitchFamily="18" charset="0"/>
+                <a:cs typeface="Times New Roman" panose="02020603050405020304" pitchFamily="18" charset="0"/>
+              </a:rPr>
+              <a:t>1</a:t>
+            </a:r>
+            <a:r>
+              <a:rPr lang="en-IN" sz="2000" b="1" baseline="30000" dirty="0">
+                <a:solidFill>
+                  <a:srgbClr val="C00000"/>
+                </a:solidFill>
+                <a:latin typeface="Times New Roman" panose="02020603050405020304" pitchFamily="18" charset="0"/>
+                <a:cs typeface="Times New Roman" panose="02020603050405020304" pitchFamily="18" charset="0"/>
+              </a:rPr>
+              <a:t>st</a:t>
+            </a:r>
+            <a:r>
+              <a:rPr lang="en-IN" sz="2000" b="1" dirty="0">
+                <a:solidFill>
+                  <a:srgbClr val="C00000"/>
+                </a:solidFill>
+                <a:latin typeface="Times New Roman" panose="02020603050405020304" pitchFamily="18" charset="0"/>
+                <a:cs typeface="Times New Roman" panose="02020603050405020304" pitchFamily="18" charset="0"/>
+              </a:rPr>
+              <a:t> International Conference on Advances in Physical Sciences &amp; Technologies</a:t>
+            </a:r>
+            <a:r>
+              <a:rPr lang="en-US" sz="2000" b="1" dirty="0">
+                <a:solidFill>
+                  <a:srgbClr val="C00000"/>
+                </a:solidFill>
+                <a:latin typeface="Times New Roman" panose="02020603050405020304" pitchFamily="18" charset="0"/>
+                <a:cs typeface="Times New Roman" panose="02020603050405020304" pitchFamily="18" charset="0"/>
+              </a:rPr>
+              <a:t> (ICAPST-2026)</a:t>
+            </a:r>
+          </a:p>
+          <a:p>
+            <a:pPr algn="ctr">
+              <a:tabLst>
+                <a:tab pos="0" algn="l"/>
+              </a:tabLst>
+            </a:pPr>
+            <a:r>
+              <a:rPr lang="en-IN" sz="2000" b="1" spc="-1" dirty="0">
+                <a:latin typeface="Times New Roman" panose="02020603050405020304" pitchFamily="18" charset="0"/>
+                <a:cs typeface="Times New Roman" panose="02020603050405020304" pitchFamily="18" charset="0"/>
+              </a:rPr>
+              <a:t>October 22-24, 2026, University of Rajasthan, Jaipur, Rajasthan</a:t>
+            </a:r>
+            <a:endParaRPr lang="en-IN" sz="2000" spc="-1" dirty="0">
               <a:latin typeface="Times New Roman" panose="02020603050405020304" pitchFamily="18" charset="0"/>
               <a:cs typeface="Times New Roman" panose="02020603050405020304" pitchFamily="18" charset="0"/>
             </a:endParaRPr>
